--- a/chapter3/parts/part-11-emerging-trends-challenges/clip.pptx
+++ b/chapter3/parts/part-11-emerging-trends-challenges/clip.pptx
@@ -4384,7 +4384,7 @@
               </a:defRPr>
             </a:pPr>
             <a:r>
-              <a:t>Chapter 3 — 11 Emerging Trends Challenges</a:t>
+              <a:t>Chapter 3 — Emerging Trends Challenges</a:t>
             </a:r>
           </a:p>
         </p:txBody>
@@ -4563,7 +4563,7 @@
               </a:defRPr>
             </a:pPr>
             <a:r>
-              <a:t>Chapter 3 — 11 Emerging Trends Challenges</a:t>
+              <a:t>Chapter 3 — Emerging Trends Challenges</a:t>
             </a:r>
           </a:p>
         </p:txBody>
@@ -4742,7 +4742,7 @@
               </a:defRPr>
             </a:pPr>
             <a:r>
-              <a:t>Chapter 3 — 11 Emerging Trends Challenges</a:t>
+              <a:t>Chapter 3 — Emerging Trends Challenges</a:t>
             </a:r>
           </a:p>
         </p:txBody>
@@ -4901,7 +4901,7 @@
               </a:defRPr>
             </a:pPr>
             <a:r>
-              <a:t>Chapter 3 — 11 Emerging Trends Challenges</a:t>
+              <a:t>Chapter 3 — Emerging Trends Challenges</a:t>
             </a:r>
           </a:p>
         </p:txBody>
@@ -5060,7 +5060,7 @@
               </a:defRPr>
             </a:pPr>
             <a:r>
-              <a:t>Chapter 3 — 11 Emerging Trends Challenges</a:t>
+              <a:t>Chapter 3 — Emerging Trends Challenges</a:t>
             </a:r>
           </a:p>
         </p:txBody>
@@ -5219,7 +5219,7 @@
               </a:defRPr>
             </a:pPr>
             <a:r>
-              <a:t>Chapter 3 — 11 Emerging Trends Challenges</a:t>
+              <a:t>Chapter 3 — Emerging Trends Challenges</a:t>
             </a:r>
           </a:p>
         </p:txBody>
@@ -5418,7 +5418,7 @@
               </a:defRPr>
             </a:pPr>
             <a:r>
-              <a:t>Chapter 3 — 11 Emerging Trends Challenges</a:t>
+              <a:t>Chapter 3 — Emerging Trends Challenges</a:t>
             </a:r>
           </a:p>
         </p:txBody>
@@ -5577,7 +5577,7 @@
               </a:defRPr>
             </a:pPr>
             <a:r>
-              <a:t>Chapter 3 — 11 Emerging Trends Challenges</a:t>
+              <a:t>Chapter 3 — Emerging Trends Challenges</a:t>
             </a:r>
           </a:p>
         </p:txBody>
@@ -5756,7 +5756,7 @@
               </a:defRPr>
             </a:pPr>
             <a:r>
-              <a:t>Chapter 3 — 11 Emerging Trends Challenges</a:t>
+              <a:t>Chapter 3 — Emerging Trends Challenges</a:t>
             </a:r>
           </a:p>
         </p:txBody>
@@ -5955,7 +5955,7 @@
               </a:defRPr>
             </a:pPr>
             <a:r>
-              <a:t>Chapter 3 — 11 Emerging Trends Challenges</a:t>
+              <a:t>Chapter 3 — Emerging Trends Challenges</a:t>
             </a:r>
           </a:p>
         </p:txBody>
@@ -6114,7 +6114,7 @@
               </a:defRPr>
             </a:pPr>
             <a:r>
-              <a:t>Chapter 3 — 11 Emerging Trends Challenges</a:t>
+              <a:t>Chapter 3 — Emerging Trends Challenges</a:t>
             </a:r>
           </a:p>
         </p:txBody>
@@ -6313,7 +6313,7 @@
               </a:defRPr>
             </a:pPr>
             <a:r>
-              <a:t>Chapter 3 — 11 Emerging Trends Challenges</a:t>
+              <a:t>Chapter 3 — Emerging Trends Challenges</a:t>
             </a:r>
           </a:p>
         </p:txBody>

--- a/chapter3/parts/part-11-emerging-trends-challenges/clip.pptx
+++ b/chapter3/parts/part-11-emerging-trends-challenges/clip.pptx
@@ -4468,10 +4468,12 @@
           </a:bodyPr>
           <a:lstStyle/>
           <a:p>
-            <a:pPr>
+            <a:pPr lvl="0" marL="457200" indent="-228600">
+              <a:buFont typeface="Calibri"/>
               <a:spcAft>
                 <a:spcPts val="1000"/>
               </a:spcAft>
+              <a:buSzPct val="100000"/>
               <a:buChar char="•"/>
               <a:lnSpc>
                 <a:spcPts val="2200"/>
@@ -4488,10 +4490,12 @@
             </a:r>
           </a:p>
           <a:p>
-            <a:pPr>
+            <a:pPr lvl="0" marL="457200" indent="-228600">
+              <a:buFont typeface="Calibri"/>
               <a:spcAft>
                 <a:spcPts val="1000"/>
               </a:spcAft>
+              <a:buSzPct val="100000"/>
               <a:buChar char="•"/>
               <a:lnSpc>
                 <a:spcPts val="2200"/>
@@ -4508,10 +4512,12 @@
             </a:r>
           </a:p>
           <a:p>
-            <a:pPr>
+            <a:pPr lvl="0" marL="457200" indent="-228600">
+              <a:buFont typeface="Calibri"/>
               <a:spcAft>
                 <a:spcPts val="1000"/>
               </a:spcAft>
+              <a:buSzPct val="100000"/>
               <a:buChar char="•"/>
               <a:lnSpc>
                 <a:spcPts val="2200"/>
@@ -4647,10 +4653,12 @@
           </a:bodyPr>
           <a:lstStyle/>
           <a:p>
-            <a:pPr>
+            <a:pPr lvl="0" marL="457200" indent="-228600">
+              <a:buFont typeface="Calibri"/>
               <a:spcAft>
                 <a:spcPts val="1000"/>
               </a:spcAft>
+              <a:buSzPct val="100000"/>
               <a:buChar char="•"/>
               <a:lnSpc>
                 <a:spcPts val="2200"/>
@@ -4667,10 +4675,12 @@
             </a:r>
           </a:p>
           <a:p>
-            <a:pPr>
+            <a:pPr lvl="0" marL="457200" indent="-228600">
+              <a:buFont typeface="Calibri"/>
               <a:spcAft>
                 <a:spcPts val="1000"/>
               </a:spcAft>
+              <a:buSzPct val="100000"/>
               <a:buChar char="•"/>
               <a:lnSpc>
                 <a:spcPts val="2200"/>
@@ -4687,10 +4697,12 @@
             </a:r>
           </a:p>
           <a:p>
-            <a:pPr>
+            <a:pPr lvl="0" marL="457200" indent="-228600">
+              <a:buFont typeface="Calibri"/>
               <a:spcAft>
                 <a:spcPts val="1000"/>
               </a:spcAft>
+              <a:buSzPct val="100000"/>
               <a:buChar char="•"/>
               <a:lnSpc>
                 <a:spcPts val="2200"/>
@@ -4826,10 +4838,12 @@
           </a:bodyPr>
           <a:lstStyle/>
           <a:p>
-            <a:pPr>
+            <a:pPr lvl="0" marL="457200" indent="-228600">
+              <a:buFont typeface="Calibri"/>
               <a:spcAft>
                 <a:spcPts val="1000"/>
               </a:spcAft>
+              <a:buSzPct val="100000"/>
               <a:buChar char="•"/>
               <a:lnSpc>
                 <a:spcPts val="2200"/>
@@ -4846,10 +4860,12 @@
             </a:r>
           </a:p>
           <a:p>
-            <a:pPr>
+            <a:pPr lvl="0" marL="457200" indent="-228600">
+              <a:buFont typeface="Calibri"/>
               <a:spcAft>
                 <a:spcPts val="1000"/>
               </a:spcAft>
+              <a:buSzPct val="100000"/>
               <a:buChar char="•"/>
               <a:lnSpc>
                 <a:spcPts val="2200"/>
@@ -4985,10 +5001,12 @@
           </a:bodyPr>
           <a:lstStyle/>
           <a:p>
-            <a:pPr>
+            <a:pPr lvl="0" marL="457200" indent="-228600">
+              <a:buFont typeface="Calibri"/>
               <a:spcAft>
                 <a:spcPts val="1000"/>
               </a:spcAft>
+              <a:buSzPct val="100000"/>
               <a:buChar char="•"/>
               <a:lnSpc>
                 <a:spcPts val="2200"/>
@@ -5005,10 +5023,12 @@
             </a:r>
           </a:p>
           <a:p>
-            <a:pPr>
+            <a:pPr lvl="0" marL="457200" indent="-228600">
+              <a:buFont typeface="Calibri"/>
               <a:spcAft>
                 <a:spcPts val="1000"/>
               </a:spcAft>
+              <a:buSzPct val="100000"/>
               <a:buChar char="•"/>
               <a:lnSpc>
                 <a:spcPts val="2200"/>
@@ -5144,10 +5164,12 @@
           </a:bodyPr>
           <a:lstStyle/>
           <a:p>
-            <a:pPr>
+            <a:pPr lvl="0" marL="457200" indent="-228600">
+              <a:buFont typeface="Calibri"/>
               <a:spcAft>
                 <a:spcPts val="1000"/>
               </a:spcAft>
+              <a:buSzPct val="100000"/>
               <a:buChar char="•"/>
               <a:lnSpc>
                 <a:spcPts val="2200"/>
@@ -5164,10 +5186,12 @@
             </a:r>
           </a:p>
           <a:p>
-            <a:pPr>
+            <a:pPr lvl="0" marL="457200" indent="-228600">
+              <a:buFont typeface="Calibri"/>
               <a:spcAft>
                 <a:spcPts val="1000"/>
               </a:spcAft>
+              <a:buSzPct val="100000"/>
               <a:buChar char="•"/>
               <a:lnSpc>
                 <a:spcPts val="2200"/>
@@ -5303,10 +5327,12 @@
           </a:bodyPr>
           <a:lstStyle/>
           <a:p>
-            <a:pPr>
+            <a:pPr lvl="0" marL="457200" indent="-228600">
+              <a:buFont typeface="Calibri"/>
               <a:spcAft>
                 <a:spcPts val="1000"/>
               </a:spcAft>
+              <a:buSzPct val="100000"/>
               <a:buChar char="•"/>
               <a:lnSpc>
                 <a:spcPts val="2200"/>
@@ -5323,10 +5349,12 @@
             </a:r>
           </a:p>
           <a:p>
-            <a:pPr>
+            <a:pPr lvl="0" marL="457200" indent="-228600">
+              <a:buFont typeface="Calibri"/>
               <a:spcAft>
                 <a:spcPts val="1000"/>
               </a:spcAft>
+              <a:buSzPct val="100000"/>
               <a:buChar char="•"/>
               <a:lnSpc>
                 <a:spcPts val="2200"/>
@@ -5343,10 +5371,12 @@
             </a:r>
           </a:p>
           <a:p>
-            <a:pPr>
+            <a:pPr lvl="0" marL="457200" indent="-228600">
+              <a:buFont typeface="Calibri"/>
               <a:spcAft>
                 <a:spcPts val="1000"/>
               </a:spcAft>
+              <a:buSzPct val="100000"/>
               <a:buChar char="•"/>
               <a:lnSpc>
                 <a:spcPts val="2200"/>
@@ -5363,10 +5393,12 @@
             </a:r>
           </a:p>
           <a:p>
-            <a:pPr>
+            <a:pPr lvl="0" marL="457200" indent="-228600">
+              <a:buFont typeface="Calibri"/>
               <a:spcAft>
                 <a:spcPts val="1000"/>
               </a:spcAft>
+              <a:buSzPct val="100000"/>
               <a:buChar char="•"/>
               <a:lnSpc>
                 <a:spcPts val="2200"/>
@@ -5502,10 +5534,12 @@
           </a:bodyPr>
           <a:lstStyle/>
           <a:p>
-            <a:pPr>
+            <a:pPr lvl="0" marL="457200" indent="-228600">
+              <a:buFont typeface="Calibri"/>
               <a:spcAft>
                 <a:spcPts val="1000"/>
               </a:spcAft>
+              <a:buSzPct val="100000"/>
               <a:buChar char="•"/>
               <a:lnSpc>
                 <a:spcPts val="2200"/>
@@ -5522,10 +5556,12 @@
             </a:r>
           </a:p>
           <a:p>
-            <a:pPr>
+            <a:pPr lvl="0" marL="457200" indent="-228600">
+              <a:buFont typeface="Calibri"/>
               <a:spcAft>
                 <a:spcPts val="1000"/>
               </a:spcAft>
+              <a:buSzPct val="100000"/>
               <a:buChar char="•"/>
               <a:lnSpc>
                 <a:spcPts val="2200"/>
@@ -5661,10 +5697,12 @@
           </a:bodyPr>
           <a:lstStyle/>
           <a:p>
-            <a:pPr>
+            <a:pPr lvl="0" marL="457200" indent="-228600">
+              <a:buFont typeface="Calibri"/>
               <a:spcAft>
                 <a:spcPts val="1000"/>
               </a:spcAft>
+              <a:buSzPct val="100000"/>
               <a:buChar char="•"/>
               <a:lnSpc>
                 <a:spcPts val="2200"/>
@@ -5681,10 +5719,12 @@
             </a:r>
           </a:p>
           <a:p>
-            <a:pPr>
+            <a:pPr lvl="0" marL="457200" indent="-228600">
+              <a:buFont typeface="Calibri"/>
               <a:spcAft>
                 <a:spcPts val="1000"/>
               </a:spcAft>
+              <a:buSzPct val="100000"/>
               <a:buChar char="•"/>
               <a:lnSpc>
                 <a:spcPts val="2200"/>
@@ -5701,10 +5741,12 @@
             </a:r>
           </a:p>
           <a:p>
-            <a:pPr>
+            <a:pPr lvl="0" marL="457200" indent="-228600">
+              <a:buFont typeface="Calibri"/>
               <a:spcAft>
                 <a:spcPts val="1000"/>
               </a:spcAft>
+              <a:buSzPct val="100000"/>
               <a:buChar char="•"/>
               <a:lnSpc>
                 <a:spcPts val="2200"/>
@@ -5840,10 +5882,12 @@
           </a:bodyPr>
           <a:lstStyle/>
           <a:p>
-            <a:pPr>
+            <a:pPr lvl="0" marL="457200" indent="-228600">
+              <a:buFont typeface="Calibri"/>
               <a:spcAft>
                 <a:spcPts val="1000"/>
               </a:spcAft>
+              <a:buSzPct val="100000"/>
               <a:buChar char="•"/>
               <a:lnSpc>
                 <a:spcPts val="2200"/>
@@ -5860,10 +5904,12 @@
             </a:r>
           </a:p>
           <a:p>
-            <a:pPr>
+            <a:pPr lvl="0" marL="457200" indent="-228600">
+              <a:buFont typeface="Calibri"/>
               <a:spcAft>
                 <a:spcPts val="1000"/>
               </a:spcAft>
+              <a:buSzPct val="100000"/>
               <a:buChar char="•"/>
               <a:lnSpc>
                 <a:spcPts val="2200"/>
@@ -5880,10 +5926,12 @@
             </a:r>
           </a:p>
           <a:p>
-            <a:pPr>
+            <a:pPr lvl="0" marL="457200" indent="-228600">
+              <a:buFont typeface="Calibri"/>
               <a:spcAft>
                 <a:spcPts val="1000"/>
               </a:spcAft>
+              <a:buSzPct val="100000"/>
               <a:buChar char="•"/>
               <a:lnSpc>
                 <a:spcPts val="2200"/>
@@ -5900,10 +5948,12 @@
             </a:r>
           </a:p>
           <a:p>
-            <a:pPr>
+            <a:pPr lvl="0" marL="457200" indent="-228600">
+              <a:buFont typeface="Calibri"/>
               <a:spcAft>
                 <a:spcPts val="1000"/>
               </a:spcAft>
+              <a:buSzPct val="100000"/>
               <a:buChar char="•"/>
               <a:lnSpc>
                 <a:spcPts val="2200"/>
@@ -6039,10 +6089,12 @@
           </a:bodyPr>
           <a:lstStyle/>
           <a:p>
-            <a:pPr>
+            <a:pPr lvl="0" marL="457200" indent="-228600">
+              <a:buFont typeface="Calibri"/>
               <a:spcAft>
                 <a:spcPts val="1000"/>
               </a:spcAft>
+              <a:buSzPct val="100000"/>
               <a:buChar char="•"/>
               <a:lnSpc>
                 <a:spcPts val="2200"/>
@@ -6059,10 +6111,12 @@
             </a:r>
           </a:p>
           <a:p>
-            <a:pPr>
+            <a:pPr lvl="0" marL="457200" indent="-228600">
+              <a:buFont typeface="Calibri"/>
               <a:spcAft>
                 <a:spcPts val="1000"/>
               </a:spcAft>
+              <a:buSzPct val="100000"/>
               <a:buChar char="•"/>
               <a:lnSpc>
                 <a:spcPts val="2200"/>
@@ -6198,10 +6252,12 @@
           </a:bodyPr>
           <a:lstStyle/>
           <a:p>
-            <a:pPr>
+            <a:pPr lvl="0" marL="457200" indent="-228600">
+              <a:buFont typeface="Calibri"/>
               <a:spcAft>
                 <a:spcPts val="1000"/>
               </a:spcAft>
+              <a:buSzPct val="100000"/>
               <a:buChar char="•"/>
               <a:lnSpc>
                 <a:spcPts val="2200"/>
@@ -6218,10 +6274,12 @@
             </a:r>
           </a:p>
           <a:p>
-            <a:pPr>
+            <a:pPr lvl="0" marL="457200" indent="-228600">
+              <a:buFont typeface="Calibri"/>
               <a:spcAft>
                 <a:spcPts val="1000"/>
               </a:spcAft>
+              <a:buSzPct val="100000"/>
               <a:buChar char="•"/>
               <a:lnSpc>
                 <a:spcPts val="2200"/>
@@ -6238,10 +6296,12 @@
             </a:r>
           </a:p>
           <a:p>
-            <a:pPr>
+            <a:pPr lvl="0" marL="457200" indent="-228600">
+              <a:buFont typeface="Calibri"/>
               <a:spcAft>
                 <a:spcPts val="1000"/>
               </a:spcAft>
+              <a:buSzPct val="100000"/>
               <a:buChar char="•"/>
               <a:lnSpc>
                 <a:spcPts val="2200"/>
@@ -6258,10 +6318,12 @@
             </a:r>
           </a:p>
           <a:p>
-            <a:pPr>
+            <a:pPr lvl="0" marL="457200" indent="-228600">
+              <a:buFont typeface="Calibri"/>
               <a:spcAft>
                 <a:spcPts val="1000"/>
               </a:spcAft>
+              <a:buSzPct val="100000"/>
               <a:buChar char="•"/>
               <a:lnSpc>
                 <a:spcPts val="2200"/>
